--- a/assets/pptx/catalog-769.pptx
+++ b/assets/pptx/catalog-769.pptx
@@ -3295,7 +3295,7 @@
                 <a:ea typeface="Ebrima"/>
                 <a:cs typeface="Ebrima"/>
               </a:rPr>
-              <a:t>ቅዱስ ካህን አለን በላይ በሰማይ (2x)</a:t>
+              <a:t>ቅዱስ ካህን አለን በላይ በሰማይ 2x</a:t>
             </a:r>
           </a:p>
           <a:p>
@@ -3439,7 +3439,7 @@
                 <a:ea typeface="Ebrima"/>
                 <a:cs typeface="Ebrima"/>
               </a:rPr>
-              <a:t>ቅዱስ ካህን አለን በላይ በሰማይ (2x)</a:t>
+              <a:t>ቅዱስ ካህን አለን በላይ በሰማይ 2x</a:t>
             </a:r>
           </a:p>
           <a:p>
@@ -3655,7 +3655,7 @@
                 <a:ea typeface="Ebrima"/>
                 <a:cs typeface="Ebrima"/>
               </a:rPr>
-              <a:t>ቅዱስ ካህን አለን በላይ በሰማይ (2x)</a:t>
+              <a:t>ቅዱስ ካህን አለን በላይ በሰማይ 2x</a:t>
             </a:r>
           </a:p>
         </p:txBody>
